--- a/Project Poster - Weather App.pptx
+++ b/Project Poster - Weather App.pptx
@@ -243,7 +243,7 @@
           <a:p>
             <a:fld id="{96F86DA2-6F35-4111-ACB3-E2300C0C7C15}" type="datetimeFigureOut">
               <a:rPr lang="en-GB" smtClean="0"/>
-              <a:t>28/05/2026</a:t>
+              <a:t>03/06/2026</a:t>
             </a:fld>
             <a:endParaRPr lang="en-GB"/>
           </a:p>
@@ -413,7 +413,7 @@
           <a:p>
             <a:fld id="{96F86DA2-6F35-4111-ACB3-E2300C0C7C15}" type="datetimeFigureOut">
               <a:rPr lang="en-GB" smtClean="0"/>
-              <a:t>28/05/2026</a:t>
+              <a:t>03/06/2026</a:t>
             </a:fld>
             <a:endParaRPr lang="en-GB"/>
           </a:p>
@@ -593,7 +593,7 @@
           <a:p>
             <a:fld id="{96F86DA2-6F35-4111-ACB3-E2300C0C7C15}" type="datetimeFigureOut">
               <a:rPr lang="en-GB" smtClean="0"/>
-              <a:t>28/05/2026</a:t>
+              <a:t>03/06/2026</a:t>
             </a:fld>
             <a:endParaRPr lang="en-GB"/>
           </a:p>
@@ -763,7 +763,7 @@
           <a:p>
             <a:fld id="{96F86DA2-6F35-4111-ACB3-E2300C0C7C15}" type="datetimeFigureOut">
               <a:rPr lang="en-GB" smtClean="0"/>
-              <a:t>28/05/2026</a:t>
+              <a:t>03/06/2026</a:t>
             </a:fld>
             <a:endParaRPr lang="en-GB"/>
           </a:p>
@@ -1007,7 +1007,7 @@
           <a:p>
             <a:fld id="{96F86DA2-6F35-4111-ACB3-E2300C0C7C15}" type="datetimeFigureOut">
               <a:rPr lang="en-GB" smtClean="0"/>
-              <a:t>28/05/2026</a:t>
+              <a:t>03/06/2026</a:t>
             </a:fld>
             <a:endParaRPr lang="en-GB"/>
           </a:p>
@@ -1239,7 +1239,7 @@
           <a:p>
             <a:fld id="{96F86DA2-6F35-4111-ACB3-E2300C0C7C15}" type="datetimeFigureOut">
               <a:rPr lang="en-GB" smtClean="0"/>
-              <a:t>28/05/2026</a:t>
+              <a:t>03/06/2026</a:t>
             </a:fld>
             <a:endParaRPr lang="en-GB"/>
           </a:p>
@@ -1606,7 +1606,7 @@
           <a:p>
             <a:fld id="{96F86DA2-6F35-4111-ACB3-E2300C0C7C15}" type="datetimeFigureOut">
               <a:rPr lang="en-GB" smtClean="0"/>
-              <a:t>28/05/2026</a:t>
+              <a:t>03/06/2026</a:t>
             </a:fld>
             <a:endParaRPr lang="en-GB"/>
           </a:p>
@@ -1724,7 +1724,7 @@
           <a:p>
             <a:fld id="{96F86DA2-6F35-4111-ACB3-E2300C0C7C15}" type="datetimeFigureOut">
               <a:rPr lang="en-GB" smtClean="0"/>
-              <a:t>28/05/2026</a:t>
+              <a:t>03/06/2026</a:t>
             </a:fld>
             <a:endParaRPr lang="en-GB"/>
           </a:p>
@@ -1819,7 +1819,7 @@
           <a:p>
             <a:fld id="{96F86DA2-6F35-4111-ACB3-E2300C0C7C15}" type="datetimeFigureOut">
               <a:rPr lang="en-GB" smtClean="0"/>
-              <a:t>28/05/2026</a:t>
+              <a:t>03/06/2026</a:t>
             </a:fld>
             <a:endParaRPr lang="en-GB"/>
           </a:p>
@@ -2096,7 +2096,7 @@
           <a:p>
             <a:fld id="{96F86DA2-6F35-4111-ACB3-E2300C0C7C15}" type="datetimeFigureOut">
               <a:rPr lang="en-GB" smtClean="0"/>
-              <a:t>28/05/2026</a:t>
+              <a:t>03/06/2026</a:t>
             </a:fld>
             <a:endParaRPr lang="en-GB"/>
           </a:p>
@@ -2353,7 +2353,7 @@
           <a:p>
             <a:fld id="{96F86DA2-6F35-4111-ACB3-E2300C0C7C15}" type="datetimeFigureOut">
               <a:rPr lang="en-GB" smtClean="0"/>
-              <a:t>28/05/2026</a:t>
+              <a:t>03/06/2026</a:t>
             </a:fld>
             <a:endParaRPr lang="en-GB"/>
           </a:p>
@@ -2566,7 +2566,7 @@
           <a:p>
             <a:fld id="{96F86DA2-6F35-4111-ACB3-E2300C0C7C15}" type="datetimeFigureOut">
               <a:rPr lang="en-GB" smtClean="0"/>
-              <a:t>28/05/2026</a:t>
+              <a:t>03/06/2026</a:t>
             </a:fld>
             <a:endParaRPr lang="en-GB"/>
           </a:p>
@@ -3291,8 +3291,8 @@
         </p:blipFill>
         <p:spPr>
           <a:xfrm>
-            <a:off x="14161477" y="4478213"/>
-            <a:ext cx="11038498" cy="12640408"/>
+            <a:off x="14365545" y="4450087"/>
+            <a:ext cx="10437555" cy="14044807"/>
           </a:xfrm>
           <a:prstGeom prst="rect">
             <a:avLst/>
@@ -3316,18 +3316,15 @@
             <a:off x="818147" y="4478213"/>
             <a:ext cx="13343330" cy="5462955"/>
           </a:xfrm>
-          <a:prstGeom prst="rect">
+          <a:prstGeom prst="roundRect">
             <a:avLst/>
           </a:prstGeom>
           <a:solidFill>
-            <a:schemeClr val="accent1">
-              <a:lumMod val="20000"/>
-              <a:lumOff val="80000"/>
-            </a:schemeClr>
+            <a:srgbClr val="E3F2FD"/>
           </a:solidFill>
-          <a:ln>
+          <a:ln w="15875">
             <a:solidFill>
-              <a:schemeClr val="bg1"/>
+              <a:srgbClr val="1976D2"/>
             </a:solidFill>
           </a:ln>
         </p:spPr>
@@ -3352,17 +3349,25 @@
           <a:lstStyle/>
           <a:p>
             <a:r>
-              <a:rPr lang="en-US" sz="5400" dirty="0">
+              <a:rPr lang="en-US" sz="3600" dirty="0">
                 <a:solidFill>
                   <a:schemeClr val="tx1"/>
                 </a:solidFill>
               </a:rPr>
-              <a:t>1. Introduction</a:t>
-            </a:r>
-          </a:p>
-          <a:p>
-            <a:r>
-              <a:rPr lang="en-US" sz="3800" dirty="0">
+              <a:t>1. </a:t>
+            </a:r>
+            <a:r>
+              <a:rPr lang="en-US" sz="3600" b="1" dirty="0">
+                <a:solidFill>
+                  <a:schemeClr val="tx1"/>
+                </a:solidFill>
+              </a:rPr>
+              <a:t>Introduction</a:t>
+            </a:r>
+          </a:p>
+          <a:p>
+            <a:r>
+              <a:rPr lang="en-US" sz="3600" dirty="0">
                 <a:solidFill>
                   <a:schemeClr val="tx1"/>
                 </a:solidFill>
@@ -3372,14 +3377,14 @@
           </a:p>
           <a:p>
             <a:r>
-              <a:rPr lang="en-US" sz="3800" dirty="0">
+              <a:rPr lang="en-US" sz="3600" dirty="0">
                 <a:solidFill>
                   <a:schemeClr val="tx1"/>
                 </a:solidFill>
               </a:rPr>
               <a:t>• Core Objective: To leverage modern Android development standards to create a tool that is both "Offline-First" (via Room database) and highly responsive (via Coroutines and Flow).</a:t>
             </a:r>
-            <a:endParaRPr lang="en-IL" sz="3800" dirty="0">
+            <a:endParaRPr lang="en-IL" sz="3600" dirty="0">
               <a:solidFill>
                 <a:schemeClr val="tx1"/>
               </a:solidFill>
@@ -3402,20 +3407,17 @@
         <p:spPr>
           <a:xfrm>
             <a:off x="818147" y="10190281"/>
-            <a:ext cx="13343330" cy="6928340"/>
+            <a:ext cx="13343330" cy="7147558"/>
           </a:xfrm>
-          <a:prstGeom prst="rect">
+          <a:prstGeom prst="roundRect">
             <a:avLst/>
           </a:prstGeom>
           <a:solidFill>
-            <a:schemeClr val="accent1">
-              <a:lumMod val="60000"/>
-              <a:lumOff val="40000"/>
-            </a:schemeClr>
+            <a:srgbClr val="E8F5E9"/>
           </a:solidFill>
-          <a:ln>
+          <a:ln w="15875">
             <a:solidFill>
-              <a:schemeClr val="bg1"/>
+              <a:srgbClr val="388E3C"/>
             </a:solidFill>
           </a:ln>
         </p:spPr>
@@ -3440,17 +3442,25 @@
           <a:lstStyle/>
           <a:p>
             <a:r>
-              <a:rPr lang="en-US" sz="5400" dirty="0">
+              <a:rPr lang="en-US" sz="3600" dirty="0">
                 <a:solidFill>
                   <a:schemeClr val="tx1"/>
                 </a:solidFill>
               </a:rPr>
-              <a:t>2. Technical Architecture &amp; Tech Stack</a:t>
-            </a:r>
-          </a:p>
-          <a:p>
-            <a:r>
-              <a:rPr lang="en-US" sz="3800" dirty="0">
+              <a:t>2. </a:t>
+            </a:r>
+            <a:r>
+              <a:rPr lang="en-US" sz="3600" b="1" dirty="0">
+                <a:solidFill>
+                  <a:schemeClr val="tx1"/>
+                </a:solidFill>
+              </a:rPr>
+              <a:t>Technical Architecture &amp; Tech Stack</a:t>
+            </a:r>
+          </a:p>
+          <a:p>
+            <a:r>
+              <a:rPr lang="en-US" sz="3600" dirty="0">
                 <a:solidFill>
                   <a:schemeClr val="tx1"/>
                 </a:solidFill>
@@ -3458,7 +3468,7 @@
               <a:t>• Architecture: The app strictly follows the MVVM (Model-View-</a:t>
             </a:r>
             <a:r>
-              <a:rPr lang="en-US" sz="3800" dirty="0" err="1">
+              <a:rPr lang="en-US" sz="3600" dirty="0" err="1">
                 <a:solidFill>
                   <a:schemeClr val="tx1"/>
                 </a:solidFill>
@@ -3466,7 +3476,7 @@
               <a:t>ViewModel</a:t>
             </a:r>
             <a:r>
-              <a:rPr lang="en-US" sz="3800" dirty="0">
+              <a:rPr lang="en-US" sz="3600" dirty="0">
                 <a:solidFill>
                   <a:schemeClr val="tx1"/>
                 </a:solidFill>
@@ -3476,7 +3486,7 @@
           </a:p>
           <a:p>
             <a:r>
-              <a:rPr lang="en-US" sz="3800" dirty="0">
+              <a:rPr lang="en-US" sz="3600" dirty="0">
                 <a:solidFill>
                   <a:schemeClr val="tx1"/>
                 </a:solidFill>
@@ -3486,7 +3496,7 @@
           </a:p>
           <a:p>
             <a:r>
-              <a:rPr lang="en-US" sz="3800" dirty="0">
+              <a:rPr lang="en-US" sz="3600" dirty="0">
                 <a:solidFill>
                   <a:schemeClr val="tx1"/>
                 </a:solidFill>
@@ -3496,7 +3506,7 @@
           </a:p>
           <a:p>
             <a:r>
-              <a:rPr lang="en-US" sz="3800" dirty="0">
+              <a:rPr lang="en-US" sz="3600" dirty="0">
                 <a:solidFill>
                   <a:schemeClr val="tx1"/>
                 </a:solidFill>
@@ -3504,7 +3514,7 @@
               <a:t>• Background Tasks: </a:t>
             </a:r>
             <a:r>
-              <a:rPr lang="en-US" sz="3800" dirty="0" err="1">
+              <a:rPr lang="en-US" sz="3600" dirty="0" err="1">
                 <a:solidFill>
                   <a:schemeClr val="tx1"/>
                 </a:solidFill>
@@ -3512,14 +3522,14 @@
               <a:t>WorkManager</a:t>
             </a:r>
             <a:r>
-              <a:rPr lang="en-US" sz="3800" dirty="0">
+              <a:rPr lang="en-US" sz="3600" dirty="0">
                 <a:solidFill>
                   <a:schemeClr val="tx1"/>
                 </a:solidFill>
               </a:rPr>
               <a:t> is implemented to handle periodic weather updates in the background, ensuring data is fresh even when the app is closed.</a:t>
             </a:r>
-            <a:endParaRPr lang="en-IL" sz="3800" dirty="0">
+            <a:endParaRPr lang="en-IL" sz="3600" dirty="0">
               <a:solidFill>
                 <a:schemeClr val="tx1"/>
               </a:solidFill>
@@ -3541,20 +3551,18 @@
         </p:nvSpPr>
         <p:spPr>
           <a:xfrm>
-            <a:off x="818147" y="17367734"/>
-            <a:ext cx="13343330" cy="6313460"/>
+            <a:off x="818147" y="17574667"/>
+            <a:ext cx="13343330" cy="6819166"/>
           </a:xfrm>
-          <a:prstGeom prst="rect">
+          <a:prstGeom prst="roundRect">
             <a:avLst/>
           </a:prstGeom>
           <a:solidFill>
-            <a:schemeClr val="accent5">
-              <a:lumMod val="75000"/>
-            </a:schemeClr>
+            <a:srgbClr val="FFF3E0"/>
           </a:solidFill>
-          <a:ln>
+          <a:ln w="15875">
             <a:solidFill>
-              <a:schemeClr val="bg1"/>
+              <a:srgbClr val="F57C00"/>
             </a:solidFill>
           </a:ln>
         </p:spPr>
@@ -3579,7 +3587,7 @@
           <a:lstStyle/>
           <a:p>
             <a:r>
-              <a:rPr lang="en-US" sz="5400" dirty="0">
+              <a:rPr lang="en-US" sz="3600" dirty="0">
                 <a:solidFill>
                   <a:schemeClr val="tx1"/>
                 </a:solidFill>
@@ -3589,7 +3597,7 @@
           </a:p>
           <a:p>
             <a:r>
-              <a:rPr lang="en-US" sz="3800" dirty="0">
+              <a:rPr lang="en-US" sz="3600" dirty="0">
                 <a:solidFill>
                   <a:schemeClr val="tx1"/>
                 </a:solidFill>
@@ -3599,7 +3607,7 @@
           </a:p>
           <a:p>
             <a:r>
-              <a:rPr lang="en-US" sz="3800" dirty="0">
+              <a:rPr lang="en-US" sz="3600" dirty="0">
                 <a:solidFill>
                   <a:schemeClr val="tx1"/>
                 </a:solidFill>
@@ -3609,7 +3617,7 @@
           </a:p>
           <a:p>
             <a:r>
-              <a:rPr lang="en-US" sz="3800" dirty="0">
+              <a:rPr lang="en-US" sz="3600" dirty="0">
                 <a:solidFill>
                   <a:schemeClr val="tx1"/>
                 </a:solidFill>
@@ -3619,7 +3627,7 @@
           </a:p>
           <a:p>
             <a:r>
-              <a:rPr lang="en-US" sz="3800" dirty="0">
+              <a:rPr lang="en-US" sz="3600" dirty="0">
                 <a:solidFill>
                   <a:schemeClr val="tx1"/>
                 </a:solidFill>
@@ -3629,7 +3637,7 @@
           </a:p>
           <a:p>
             <a:r>
-              <a:rPr lang="en-US" sz="3800" dirty="0">
+              <a:rPr lang="en-US" sz="3600" dirty="0">
                 <a:solidFill>
                   <a:schemeClr val="tx1"/>
                 </a:solidFill>
@@ -3639,7 +3647,7 @@
           </a:p>
           <a:p>
             <a:r>
-              <a:rPr lang="en-US" sz="3800" dirty="0">
+              <a:rPr lang="en-US" sz="3600" dirty="0">
                 <a:solidFill>
                   <a:schemeClr val="tx1"/>
                 </a:solidFill>
@@ -3649,7 +3657,7 @@
           </a:p>
           <a:p>
             <a:r>
-              <a:rPr lang="en-US" sz="3800" dirty="0">
+              <a:rPr lang="en-US" sz="3600" dirty="0">
                 <a:solidFill>
                   <a:schemeClr val="tx1"/>
                 </a:solidFill>
@@ -3657,7 +3665,7 @@
               <a:t>• UI/UX: Built using Material 3 design principles and </a:t>
             </a:r>
             <a:r>
-              <a:rPr lang="en-US" sz="3800" dirty="0" err="1">
+              <a:rPr lang="en-US" sz="3600" dirty="0" err="1">
                 <a:solidFill>
                   <a:schemeClr val="tx1"/>
                 </a:solidFill>
@@ -3665,14 +3673,14 @@
               <a:t>ViewBinding</a:t>
             </a:r>
             <a:r>
-              <a:rPr lang="en-US" sz="3800" dirty="0">
+              <a:rPr lang="en-US" sz="3600" dirty="0">
                 <a:solidFill>
                   <a:schemeClr val="tx1"/>
                 </a:solidFill>
               </a:rPr>
               <a:t> for efficient UI updates.</a:t>
             </a:r>
-            <a:endParaRPr lang="en-IL" sz="3800" dirty="0">
+            <a:endParaRPr lang="en-IL" sz="3600" dirty="0">
               <a:solidFill>
                 <a:schemeClr val="tx1"/>
               </a:solidFill>
@@ -3694,21 +3702,18 @@
         </p:nvSpPr>
         <p:spPr>
           <a:xfrm>
-            <a:off x="818147" y="23930307"/>
-            <a:ext cx="13343330" cy="6195647"/>
+            <a:off x="818147" y="24630661"/>
+            <a:ext cx="13343330" cy="6429442"/>
           </a:xfrm>
-          <a:prstGeom prst="rect">
+          <a:prstGeom prst="roundRect">
             <a:avLst/>
           </a:prstGeom>
           <a:solidFill>
-            <a:schemeClr val="tx2">
-              <a:lumMod val="20000"/>
-              <a:lumOff val="80000"/>
-            </a:schemeClr>
+            <a:srgbClr val="F3E5F5"/>
           </a:solidFill>
-          <a:ln>
+          <a:ln w="15875">
             <a:solidFill>
-              <a:schemeClr val="bg1"/>
+              <a:srgbClr val="7B1FA2"/>
             </a:solidFill>
           </a:ln>
         </p:spPr>
@@ -3733,17 +3738,25 @@
           <a:lstStyle/>
           <a:p>
             <a:r>
-              <a:rPr lang="en-US" sz="5400" dirty="0">
+              <a:rPr lang="en-US" sz="3600" dirty="0">
                 <a:solidFill>
                   <a:schemeClr val="tx1"/>
                 </a:solidFill>
               </a:rPr>
-              <a:t>4. Conclusions</a:t>
-            </a:r>
-          </a:p>
-          <a:p>
-            <a:r>
-              <a:rPr lang="en-US" sz="3800" dirty="0">
+              <a:t>4. </a:t>
+            </a:r>
+            <a:r>
+              <a:rPr lang="en-US" sz="3600" b="1" dirty="0">
+                <a:solidFill>
+                  <a:schemeClr val="tx1"/>
+                </a:solidFill>
+              </a:rPr>
+              <a:t>Conclusions</a:t>
+            </a:r>
+          </a:p>
+          <a:p>
+            <a:r>
+              <a:rPr lang="en-US" sz="3600" dirty="0">
                 <a:solidFill>
                   <a:schemeClr val="tx1"/>
                 </a:solidFill>
@@ -3753,7 +3766,7 @@
           </a:p>
           <a:p>
             <a:r>
-              <a:rPr lang="en-US" sz="3800" dirty="0">
+              <a:rPr lang="en-US" sz="3600" dirty="0">
                 <a:solidFill>
                   <a:schemeClr val="tx1"/>
                 </a:solidFill>
@@ -3761,7 +3774,7 @@
               <a:t>• Results: The app provides sub-second UI updates through reactive streams (</a:t>
             </a:r>
             <a:r>
-              <a:rPr lang="en-US" sz="3800" dirty="0" err="1">
+              <a:rPr lang="en-US" sz="3600" dirty="0" err="1">
                 <a:solidFill>
                   <a:schemeClr val="tx1"/>
                 </a:solidFill>
@@ -3769,7 +3782,7 @@
               <a:t>LiveData</a:t>
             </a:r>
             <a:r>
-              <a:rPr lang="en-US" sz="3800" dirty="0">
+              <a:rPr lang="en-US" sz="3600" dirty="0">
                 <a:solidFill>
                   <a:schemeClr val="tx1"/>
                 </a:solidFill>
@@ -3779,14 +3792,14 @@
           </a:p>
           <a:p>
             <a:r>
-              <a:rPr lang="en-US" sz="3800" dirty="0">
+              <a:rPr lang="en-US" sz="3600" dirty="0">
                 <a:solidFill>
                   <a:schemeClr val="tx1"/>
                 </a:solidFill>
               </a:rPr>
               <a:t>• Comparison: Compared to the initial project target of a simple weather display, the final result exceeds requirements by including background workers, advanced Air Quality data, and persistent user favorites using Room.</a:t>
             </a:r>
-            <a:endParaRPr lang="en-IL" sz="3800" dirty="0">
+            <a:endParaRPr lang="en-IL" sz="3600" dirty="0">
               <a:solidFill>
                 <a:schemeClr val="tx1"/>
               </a:solidFill>
@@ -3808,21 +3821,18 @@
         </p:nvSpPr>
         <p:spPr>
           <a:xfrm>
-            <a:off x="818147" y="30345172"/>
-            <a:ext cx="13343330" cy="4258415"/>
+            <a:off x="818147" y="31296930"/>
+            <a:ext cx="13343330" cy="4037428"/>
           </a:xfrm>
-          <a:prstGeom prst="rect">
+          <a:prstGeom prst="roundRect">
             <a:avLst/>
           </a:prstGeom>
           <a:solidFill>
-            <a:schemeClr val="tx2">
-              <a:lumMod val="40000"/>
-              <a:lumOff val="60000"/>
-            </a:schemeClr>
+            <a:srgbClr val="ECEFF1"/>
           </a:solidFill>
-          <a:ln>
+          <a:ln w="15875">
             <a:solidFill>
-              <a:schemeClr val="bg1"/>
+              <a:srgbClr val="455A64"/>
             </a:solidFill>
           </a:ln>
         </p:spPr>
@@ -3847,17 +3857,25 @@
           <a:lstStyle/>
           <a:p>
             <a:r>
-              <a:rPr lang="en-US" sz="5400" dirty="0">
+              <a:rPr lang="en-US" sz="3600" dirty="0">
                 <a:solidFill>
                   <a:schemeClr val="tx1"/>
                 </a:solidFill>
               </a:rPr>
-              <a:t>5. Discussions</a:t>
-            </a:r>
-          </a:p>
-          <a:p>
-            <a:r>
-              <a:rPr lang="en-US" sz="3800" dirty="0">
+              <a:t>5. </a:t>
+            </a:r>
+            <a:r>
+              <a:rPr lang="en-US" sz="3600" b="1" dirty="0">
+                <a:solidFill>
+                  <a:schemeClr val="tx1"/>
+                </a:solidFill>
+              </a:rPr>
+              <a:t>Discussions</a:t>
+            </a:r>
+          </a:p>
+          <a:p>
+            <a:r>
+              <a:rPr lang="en-US" sz="3600" dirty="0">
                 <a:solidFill>
                   <a:schemeClr val="tx1"/>
                 </a:solidFill>
@@ -3867,7 +3885,7 @@
           </a:p>
           <a:p>
             <a:r>
-              <a:rPr lang="en-US" sz="3800" dirty="0">
+              <a:rPr lang="en-US" sz="3600" dirty="0">
                 <a:solidFill>
                   <a:schemeClr val="tx1"/>
                 </a:solidFill>
@@ -3898,21 +3916,18 @@
         </p:nvSpPr>
         <p:spPr>
           <a:xfrm>
-            <a:off x="15387760" y="31356292"/>
-            <a:ext cx="8994068" cy="4258415"/>
+            <a:off x="14365545" y="31356292"/>
+            <a:ext cx="10016283" cy="4258415"/>
           </a:xfrm>
-          <a:prstGeom prst="rect">
+          <a:prstGeom prst="roundRect">
             <a:avLst/>
           </a:prstGeom>
           <a:solidFill>
-            <a:schemeClr val="tx2">
-              <a:lumMod val="40000"/>
-              <a:lumOff val="60000"/>
-            </a:schemeClr>
+            <a:srgbClr val="E3F2FD"/>
           </a:solidFill>
-          <a:ln>
+          <a:ln w="15875">
             <a:solidFill>
-              <a:schemeClr val="bg1"/>
+              <a:srgbClr val="1976D2"/>
             </a:solidFill>
           </a:ln>
         </p:spPr>
@@ -3949,10 +3964,10 @@
       </p:sp>
       <p:pic>
         <p:nvPicPr>
-          <p:cNvPr id="24" name="Picture 23">
+          <p:cNvPr id="4" name="Picture 3">
             <a:extLst>
               <a:ext uri="{FF2B5EF4-FFF2-40B4-BE49-F238E27FC236}">
-                <a16:creationId xmlns:a16="http://schemas.microsoft.com/office/drawing/2014/main" id="{EBC27D7A-F651-9866-FD08-42A582A9385D}"/>
+                <a16:creationId xmlns:a16="http://schemas.microsoft.com/office/drawing/2014/main" id="{80E5E944-9042-B0E1-0F61-23D62EA3329A}"/>
               </a:ext>
             </a:extLst>
           </p:cNvPr>
@@ -3975,42 +3990,6 @@
         </p:blipFill>
         <p:spPr>
           <a:xfrm>
-            <a:off x="15387760" y="17367734"/>
-            <a:ext cx="8994068" cy="13173811"/>
-          </a:xfrm>
-          <a:prstGeom prst="rect">
-            <a:avLst/>
-          </a:prstGeom>
-        </p:spPr>
-      </p:pic>
-      <p:pic>
-        <p:nvPicPr>
-          <p:cNvPr id="4" name="Picture 3">
-            <a:extLst>
-              <a:ext uri="{FF2B5EF4-FFF2-40B4-BE49-F238E27FC236}">
-                <a16:creationId xmlns:a16="http://schemas.microsoft.com/office/drawing/2014/main" id="{80E5E944-9042-B0E1-0F61-23D62EA3329A}"/>
-              </a:ext>
-            </a:extLst>
-          </p:cNvPr>
-          <p:cNvPicPr>
-            <a:picLocks noChangeAspect="1"/>
-          </p:cNvPicPr>
-          <p:nvPr/>
-        </p:nvPicPr>
-        <p:blipFill>
-          <a:blip r:embed="rId5">
-            <a:extLst>
-              <a:ext uri="{28A0092B-C50C-407E-A947-70E740481C1C}">
-                <a14:useLocalDpi xmlns:a14="http://schemas.microsoft.com/office/drawing/2010/main" val="0"/>
-              </a:ext>
-            </a:extLst>
-          </a:blip>
-          <a:stretch>
-            <a:fillRect/>
-          </a:stretch>
-        </p:blipFill>
-        <p:spPr>
-          <a:xfrm>
             <a:off x="20889978" y="32131266"/>
             <a:ext cx="3203092" cy="3203092"/>
           </a:xfrm>
@@ -4088,6 +4067,30 @@
           </a:p>
         </p:txBody>
       </p:sp>
+      <p:pic>
+        <p:nvPicPr>
+          <p:cNvPr id="1028" name="Picture 1027" descr="hand_phone.jpg"/>
+          <p:cNvPicPr>
+            <a:picLocks noChangeAspect="1"/>
+          </p:cNvPicPr>
+          <p:nvPr/>
+        </p:nvPicPr>
+        <p:blipFill>
+          <a:blip r:embed="rId5"/>
+          <a:stretch>
+            <a:fillRect/>
+          </a:stretch>
+        </p:blipFill>
+        <p:spPr>
+          <a:xfrm>
+            <a:off x="14365545" y="18494895"/>
+            <a:ext cx="10016283" cy="12802035"/>
+          </a:xfrm>
+          <a:prstGeom prst="rect">
+            <a:avLst/>
+          </a:prstGeom>
+        </p:spPr>
+      </p:pic>
     </p:spTree>
     <p:extLst>
       <p:ext uri="{BB962C8B-B14F-4D97-AF65-F5344CB8AC3E}">

--- a/Project Poster - Weather App.pptx
+++ b/Project Poster - Weather App.pptx
@@ -243,7 +243,7 @@
           <a:p>
             <a:fld id="{96F86DA2-6F35-4111-ACB3-E2300C0C7C15}" type="datetimeFigureOut">
               <a:rPr lang="en-GB" smtClean="0"/>
-              <a:t>03/06/2026</a:t>
+              <a:t>18/06/2026</a:t>
             </a:fld>
             <a:endParaRPr lang="en-GB"/>
           </a:p>
@@ -413,7 +413,7 @@
           <a:p>
             <a:fld id="{96F86DA2-6F35-4111-ACB3-E2300C0C7C15}" type="datetimeFigureOut">
               <a:rPr lang="en-GB" smtClean="0"/>
-              <a:t>03/06/2026</a:t>
+              <a:t>18/06/2026</a:t>
             </a:fld>
             <a:endParaRPr lang="en-GB"/>
           </a:p>
@@ -593,7 +593,7 @@
           <a:p>
             <a:fld id="{96F86DA2-6F35-4111-ACB3-E2300C0C7C15}" type="datetimeFigureOut">
               <a:rPr lang="en-GB" smtClean="0"/>
-              <a:t>03/06/2026</a:t>
+              <a:t>18/06/2026</a:t>
             </a:fld>
             <a:endParaRPr lang="en-GB"/>
           </a:p>
@@ -763,7 +763,7 @@
           <a:p>
             <a:fld id="{96F86DA2-6F35-4111-ACB3-E2300C0C7C15}" type="datetimeFigureOut">
               <a:rPr lang="en-GB" smtClean="0"/>
-              <a:t>03/06/2026</a:t>
+              <a:t>18/06/2026</a:t>
             </a:fld>
             <a:endParaRPr lang="en-GB"/>
           </a:p>
@@ -1007,7 +1007,7 @@
           <a:p>
             <a:fld id="{96F86DA2-6F35-4111-ACB3-E2300C0C7C15}" type="datetimeFigureOut">
               <a:rPr lang="en-GB" smtClean="0"/>
-              <a:t>03/06/2026</a:t>
+              <a:t>18/06/2026</a:t>
             </a:fld>
             <a:endParaRPr lang="en-GB"/>
           </a:p>
@@ -1239,7 +1239,7 @@
           <a:p>
             <a:fld id="{96F86DA2-6F35-4111-ACB3-E2300C0C7C15}" type="datetimeFigureOut">
               <a:rPr lang="en-GB" smtClean="0"/>
-              <a:t>03/06/2026</a:t>
+              <a:t>18/06/2026</a:t>
             </a:fld>
             <a:endParaRPr lang="en-GB"/>
           </a:p>
@@ -1606,7 +1606,7 @@
           <a:p>
             <a:fld id="{96F86DA2-6F35-4111-ACB3-E2300C0C7C15}" type="datetimeFigureOut">
               <a:rPr lang="en-GB" smtClean="0"/>
-              <a:t>03/06/2026</a:t>
+              <a:t>18/06/2026</a:t>
             </a:fld>
             <a:endParaRPr lang="en-GB"/>
           </a:p>
@@ -1724,7 +1724,7 @@
           <a:p>
             <a:fld id="{96F86DA2-6F35-4111-ACB3-E2300C0C7C15}" type="datetimeFigureOut">
               <a:rPr lang="en-GB" smtClean="0"/>
-              <a:t>03/06/2026</a:t>
+              <a:t>18/06/2026</a:t>
             </a:fld>
             <a:endParaRPr lang="en-GB"/>
           </a:p>
@@ -1819,7 +1819,7 @@
           <a:p>
             <a:fld id="{96F86DA2-6F35-4111-ACB3-E2300C0C7C15}" type="datetimeFigureOut">
               <a:rPr lang="en-GB" smtClean="0"/>
-              <a:t>03/06/2026</a:t>
+              <a:t>18/06/2026</a:t>
             </a:fld>
             <a:endParaRPr lang="en-GB"/>
           </a:p>
@@ -2096,7 +2096,7 @@
           <a:p>
             <a:fld id="{96F86DA2-6F35-4111-ACB3-E2300C0C7C15}" type="datetimeFigureOut">
               <a:rPr lang="en-GB" smtClean="0"/>
-              <a:t>03/06/2026</a:t>
+              <a:t>18/06/2026</a:t>
             </a:fld>
             <a:endParaRPr lang="en-GB"/>
           </a:p>
@@ -2353,7 +2353,7 @@
           <a:p>
             <a:fld id="{96F86DA2-6F35-4111-ACB3-E2300C0C7C15}" type="datetimeFigureOut">
               <a:rPr lang="en-GB" smtClean="0"/>
-              <a:t>03/06/2026</a:t>
+              <a:t>18/06/2026</a:t>
             </a:fld>
             <a:endParaRPr lang="en-GB"/>
           </a:p>
@@ -2566,7 +2566,7 @@
           <a:p>
             <a:fld id="{96F86DA2-6F35-4111-ACB3-E2300C0C7C15}" type="datetimeFigureOut">
               <a:rPr lang="en-GB" smtClean="0"/>
-              <a:t>03/06/2026</a:t>
+              <a:t>18/06/2026</a:t>
             </a:fld>
             <a:endParaRPr lang="en-GB"/>
           </a:p>
@@ -3313,8 +3313,8 @@
         </p:nvSpPr>
         <p:spPr>
           <a:xfrm>
-            <a:off x="818147" y="4478213"/>
-            <a:ext cx="13343330" cy="5462955"/>
+            <a:off x="818147" y="4599345"/>
+            <a:ext cx="13258640" cy="7369821"/>
           </a:xfrm>
           <a:prstGeom prst="roundRect">
             <a:avLst/>
@@ -3349,46 +3349,53 @@
           <a:lstStyle/>
           <a:p>
             <a:r>
-              <a:rPr lang="en-US" sz="3600" dirty="0">
+              <a:rPr sz="4000" b="1" dirty="0">
                 <a:solidFill>
                   <a:schemeClr val="tx1"/>
                 </a:solidFill>
               </a:rPr>
-              <a:t>1. </a:t>
-            </a:r>
-            <a:r>
-              <a:rPr lang="en-US" sz="3600" b="1" dirty="0">
+              <a:t>1. Introduction</a:t>
+            </a:r>
+          </a:p>
+          <a:p>
+            <a:r>
+              <a:rPr sz="3200" b="0" dirty="0">
                 <a:solidFill>
                   <a:schemeClr val="tx1"/>
                 </a:solidFill>
               </a:rPr>
-              <a:t>Introduction</a:t>
-            </a:r>
-          </a:p>
-          <a:p>
-            <a:r>
-              <a:rPr lang="en-US" sz="3600" dirty="0">
+              <a:t>• Overview: This project presents a high-performance, reactive Android Weather Application built with Kotlin. The app provides real-time meteorological data, 5-day forecasts, and detailed Air Quality Index (AQI) reports.</a:t>
+            </a:r>
+          </a:p>
+          <a:p>
+            <a:r>
+              <a:rPr sz="3200" b="0" dirty="0">
                 <a:solidFill>
                   <a:schemeClr val="tx1"/>
                 </a:solidFill>
               </a:rPr>
-              <a:t>• Overview: This project presents a high-performance, reactive Android Weather Application built with Kotlin. The app provides users with real-time meteorological data, 5-day forecasts, and detailed Air Quality Index (AQI) reports.</a:t>
-            </a:r>
-          </a:p>
-          <a:p>
-            <a:r>
-              <a:rPr lang="en-US" sz="3600" dirty="0">
+              <a:t>• Purpose: To offer a clean, distraction-free tool for monitoring local weather, air quality, and saved favorite cities.</a:t>
+            </a:r>
+          </a:p>
+          <a:p>
+            <a:r>
+              <a:rPr sz="3200" b="0" dirty="0">
                 <a:solidFill>
                   <a:schemeClr val="tx1"/>
                 </a:solidFill>
               </a:rPr>
-              <a:t>• Core Objective: To leverage modern Android development standards to create a tool that is both "Offline-First" (via Room database) and highly responsive (via Coroutines and Flow).</a:t>
-            </a:r>
-            <a:endParaRPr lang="en-IL" sz="3600" dirty="0">
-              <a:solidFill>
-                <a:schemeClr val="tx1"/>
-              </a:solidFill>
-            </a:endParaRPr>
+              <a:t>• Target Audience: General mobile users, frequent travelers, and health-conscious individuals who need reliable at-a-glance environmental information.</a:t>
+            </a:r>
+          </a:p>
+          <a:p>
+            <a:r>
+              <a:rPr sz="3200" b="0" dirty="0">
+                <a:solidFill>
+                  <a:schemeClr val="tx1"/>
+                </a:solidFill>
+              </a:rPr>
+              <a:t>• Core Objective: Leverage modern Android standards to build an "Offline-First" app (Room database) that stays responsive via Coroutines and Flow.</a:t>
+            </a:r>
           </a:p>
         </p:txBody>
       </p:sp>
@@ -3406,8 +3413,8 @@
         </p:nvSpPr>
         <p:spPr>
           <a:xfrm>
-            <a:off x="818147" y="10190281"/>
-            <a:ext cx="13343330" cy="7147558"/>
+            <a:off x="733457" y="12447639"/>
+            <a:ext cx="13343330" cy="8282070"/>
           </a:xfrm>
           <a:prstGeom prst="roundRect">
             <a:avLst/>
@@ -3442,33 +3449,25 @@
           <a:lstStyle/>
           <a:p>
             <a:r>
-              <a:rPr lang="en-US" sz="3600" dirty="0">
+              <a:rPr sz="4000" b="1" dirty="0">
                 <a:solidFill>
                   <a:schemeClr val="tx1"/>
                 </a:solidFill>
               </a:rPr>
-              <a:t>2. </a:t>
-            </a:r>
-            <a:r>
-              <a:rPr lang="en-US" sz="3600" b="1" dirty="0">
+              <a:t>2. Technical Architecture &amp; Tech Stack</a:t>
+            </a:r>
+          </a:p>
+          <a:p>
+            <a:r>
+              <a:rPr sz="3200" b="0" dirty="0">
                 <a:solidFill>
                   <a:schemeClr val="tx1"/>
                 </a:solidFill>
               </a:rPr>
-              <a:t>Technical Architecture &amp; Tech Stack</a:t>
-            </a:r>
-          </a:p>
-          <a:p>
-            <a:r>
-              <a:rPr lang="en-US" sz="3600" dirty="0">
-                <a:solidFill>
-                  <a:schemeClr val="tx1"/>
-                </a:solidFill>
-              </a:rPr>
-              <a:t>• Architecture: The app strictly follows the MVVM (Model-View-</a:t>
-            </a:r>
-            <a:r>
-              <a:rPr lang="en-US" sz="3600" dirty="0" err="1">
+              <a:t>• Architecture: MVVM (Model-View-</a:t>
+            </a:r>
+            <a:r>
+              <a:rPr sz="3200" b="0" dirty="0" err="1">
                 <a:solidFill>
                   <a:schemeClr val="tx1"/>
                 </a:solidFill>
@@ -3476,37 +3475,69 @@
               <a:t>ViewModel</a:t>
             </a:r>
             <a:r>
-              <a:rPr lang="en-US" sz="3600" dirty="0">
+              <a:rPr sz="3200" b="0" dirty="0">
                 <a:solidFill>
                   <a:schemeClr val="tx1"/>
                 </a:solidFill>
               </a:rPr>
-              <a:t>) design pattern to ensure separation of concerns.</a:t>
-            </a:r>
-          </a:p>
-          <a:p>
-            <a:r>
-              <a:rPr lang="en-US" sz="3600" dirty="0">
+              <a:t>) with clear separation between UI, </a:t>
+            </a:r>
+            <a:r>
+              <a:rPr sz="3200" b="0" dirty="0" err="1">
                 <a:solidFill>
                   <a:schemeClr val="tx1"/>
                 </a:solidFill>
               </a:rPr>
-              <a:t>• Dependency Injection: Dagger-Hilt is used to manage object lifecycles, making the app modular and testable.</a:t>
-            </a:r>
-          </a:p>
-          <a:p>
-            <a:r>
-              <a:rPr lang="en-US" sz="3600" dirty="0">
+              <a:t>ViewModels</a:t>
+            </a:r>
+            <a:r>
+              <a:rPr sz="3200" b="0" dirty="0">
                 <a:solidFill>
                   <a:schemeClr val="tx1"/>
                 </a:solidFill>
               </a:rPr>
-              <a:t>• Data Strategy: A Repository Pattern acts as the "Single Source of Truth," coordinating data between the Retrofit network client and the Room local persistence layer.</a:t>
-            </a:r>
-          </a:p>
-          <a:p>
-            <a:r>
-              <a:rPr lang="en-US" sz="3600" dirty="0">
+              <a:t>, Repository, and data sources.</a:t>
+            </a:r>
+          </a:p>
+          <a:p>
+            <a:r>
+              <a:rPr sz="3200" b="0" dirty="0">
+                <a:solidFill>
+                  <a:schemeClr val="tx1"/>
+                </a:solidFill>
+              </a:rPr>
+              <a:t>• Dependency Injection: Dagger-Hilt manages object lifecycles for modular, testable code.</a:t>
+            </a:r>
+          </a:p>
+          <a:p>
+            <a:r>
+              <a:rPr sz="3200" b="0" dirty="0">
+                <a:solidFill>
+                  <a:schemeClr val="tx1"/>
+                </a:solidFill>
+              </a:rPr>
+              <a:t>• Data Strategy: Repository Pattern as the "Single Source of Truth" between Retrofit (</a:t>
+            </a:r>
+            <a:r>
+              <a:rPr sz="3200" b="0" dirty="0" err="1">
+                <a:solidFill>
+                  <a:schemeClr val="tx1"/>
+                </a:solidFill>
+              </a:rPr>
+              <a:t>OpenWeatherMap</a:t>
+            </a:r>
+            <a:r>
+              <a:rPr sz="3200" b="0" dirty="0">
+                <a:solidFill>
+                  <a:schemeClr val="tx1"/>
+                </a:solidFill>
+              </a:rPr>
+              <a:t> API) and Room local persistence.</a:t>
+            </a:r>
+          </a:p>
+          <a:p>
+            <a:r>
+              <a:rPr sz="3200" b="0" dirty="0">
                 <a:solidFill>
                   <a:schemeClr val="tx1"/>
                 </a:solidFill>
@@ -3514,7 +3545,7 @@
               <a:t>• Background Tasks: </a:t>
             </a:r>
             <a:r>
-              <a:rPr lang="en-US" sz="3600" dirty="0" err="1">
+              <a:rPr sz="3200" b="0" dirty="0" err="1">
                 <a:solidFill>
                   <a:schemeClr val="tx1"/>
                 </a:solidFill>
@@ -3522,18 +3553,81 @@
               <a:t>WorkManager</a:t>
             </a:r>
             <a:r>
-              <a:rPr lang="en-US" sz="3600" dirty="0">
+              <a:rPr sz="3200" b="0" dirty="0">
                 <a:solidFill>
                   <a:schemeClr val="tx1"/>
                 </a:solidFill>
               </a:rPr>
-              <a:t> is implemented to handle periodic weather updates in the background, ensuring data is fresh even when the app is closed.</a:t>
-            </a:r>
-            <a:endParaRPr lang="en-IL" sz="3600" dirty="0">
-              <a:solidFill>
-                <a:schemeClr val="tx1"/>
-              </a:solidFill>
-            </a:endParaRPr>
+              <a:t> performs periodic weather updates when the app is closed.</a:t>
+            </a:r>
+          </a:p>
+          <a:p>
+            <a:r>
+              <a:rPr sz="3200" b="0" dirty="0">
+                <a:solidFill>
+                  <a:schemeClr val="tx1"/>
+                </a:solidFill>
+              </a:rPr>
+              <a:t>• External Libraries: Retrofit, </a:t>
+            </a:r>
+            <a:r>
+              <a:rPr sz="3200" b="0" dirty="0" err="1">
+                <a:solidFill>
+                  <a:schemeClr val="tx1"/>
+                </a:solidFill>
+              </a:rPr>
+              <a:t>Gson</a:t>
+            </a:r>
+            <a:r>
+              <a:rPr sz="3200" b="0" dirty="0">
+                <a:solidFill>
+                  <a:schemeClr val="tx1"/>
+                </a:solidFill>
+              </a:rPr>
+              <a:t>, Room, Dagger-Hilt, Glide, </a:t>
+            </a:r>
+            <a:r>
+              <a:rPr sz="3200" b="0" dirty="0" err="1">
+                <a:solidFill>
+                  <a:schemeClr val="tx1"/>
+                </a:solidFill>
+              </a:rPr>
+              <a:t>WorkManager</a:t>
+            </a:r>
+            <a:r>
+              <a:rPr sz="3200" b="0" dirty="0">
+                <a:solidFill>
+                  <a:schemeClr val="tx1"/>
+                </a:solidFill>
+              </a:rPr>
+              <a:t>, Jetpack Navigation, Material 3, Google Play Location Services.</a:t>
+            </a:r>
+          </a:p>
+          <a:p>
+            <a:r>
+              <a:rPr sz="3200" b="0" dirty="0">
+                <a:solidFill>
+                  <a:schemeClr val="tx1"/>
+                </a:solidFill>
+              </a:rPr>
+              <a:t>• Key Methods: offline-first repository sync, </a:t>
+            </a:r>
+            <a:r>
+              <a:rPr sz="3200" b="0" dirty="0" err="1">
+                <a:solidFill>
+                  <a:schemeClr val="tx1"/>
+                </a:solidFill>
+              </a:rPr>
+              <a:t>ViewModel</a:t>
+            </a:r>
+            <a:r>
+              <a:rPr sz="3200" b="0" dirty="0">
+                <a:solidFill>
+                  <a:schemeClr val="tx1"/>
+                </a:solidFill>
+              </a:rPr>
+              <a:t> coroutine loading, GPS-based refresh, and background worker updates.</a:t>
+            </a:r>
           </a:p>
         </p:txBody>
       </p:sp>
@@ -3551,8 +3645,8 @@
         </p:nvSpPr>
         <p:spPr>
           <a:xfrm>
-            <a:off x="818147" y="17574667"/>
-            <a:ext cx="13343330" cy="6819166"/>
+            <a:off x="733457" y="21208181"/>
+            <a:ext cx="13343330" cy="5479876"/>
           </a:xfrm>
           <a:prstGeom prst="roundRect">
             <a:avLst/>
@@ -3587,7 +3681,7 @@
           <a:lstStyle/>
           <a:p>
             <a:r>
-              <a:rPr lang="en-US" sz="3600" dirty="0">
+              <a:rPr sz="4000" b="1" dirty="0">
                 <a:solidFill>
                   <a:schemeClr val="tx1"/>
                 </a:solidFill>
@@ -3597,75 +3691,45 @@
           </a:p>
           <a:p>
             <a:r>
-              <a:rPr lang="en-US" sz="3600" dirty="0">
+              <a:rPr sz="3200" b="0" dirty="0">
                 <a:solidFill>
                   <a:schemeClr val="tx1"/>
                 </a:solidFill>
               </a:rPr>
-              <a:t>• Navigation: The app utilizes the Jetpack Navigation Component with a single-activity architecture.</a:t>
-            </a:r>
-          </a:p>
-          <a:p>
-            <a:r>
-              <a:rPr lang="en-US" sz="3600" dirty="0">
+              <a:t>• Diagrams (right): Application screen-flow chart and MVVM / Repository architecture UML-style diagram with navigation paths and screenshots.</a:t>
+            </a:r>
+          </a:p>
+          <a:p>
+            <a:r>
+              <a:rPr sz="3200" b="0" dirty="0">
                 <a:solidFill>
                   <a:schemeClr val="tx1"/>
                 </a:solidFill>
               </a:rPr>
-              <a:t>• Key Modules:</a:t>
-            </a:r>
-          </a:p>
-          <a:p>
-            <a:r>
-              <a:rPr lang="en-US" sz="3600" dirty="0">
+              <a:t>• Navigation: Single-activity app using Jetpack Navigation Component and Material 3 bottom navigation.</a:t>
+            </a:r>
+          </a:p>
+          <a:p>
+            <a:r>
+              <a:rPr sz="3200" b="0" dirty="0">
                 <a:solidFill>
                   <a:schemeClr val="tx1"/>
                 </a:solidFill>
               </a:rPr>
-              <a:t>◦Home/Latest: Immediate current weather via Location Services.</a:t>
-            </a:r>
-          </a:p>
-          <a:p>
-            <a:r>
-              <a:rPr lang="en-US" sz="3600" dirty="0">
+              <a:t>• Key Modules: Home &amp; Latest (GPS weather), Forecast, Pollution (AQI / PM2.5 / NO₂), Favorites (Room), and Settings.</a:t>
+            </a:r>
+          </a:p>
+          <a:p>
+            <a:r>
+              <a:rPr sz="3200" b="0" dirty="0">
                 <a:solidFill>
                   <a:schemeClr val="tx1"/>
                 </a:solidFill>
               </a:rPr>
-              <a:t>◦Forecast: Interactive list of upcoming weather trends.</a:t>
-            </a:r>
-          </a:p>
-          <a:p>
-            <a:r>
-              <a:rPr lang="en-US" sz="3600" dirty="0">
-                <a:solidFill>
-                  <a:schemeClr val="tx1"/>
-                </a:solidFill>
-              </a:rPr>
-              <a:t>◦ Pollution: Environmental health metrics (PM2.5, NO2, etc.).</a:t>
-            </a:r>
-          </a:p>
-          <a:p>
-            <a:r>
-              <a:rPr lang="en-US" sz="3600" dirty="0">
-                <a:solidFill>
-                  <a:schemeClr val="tx1"/>
-                </a:solidFill>
-              </a:rPr>
-              <a:t>◦ Favorites: A personalized database of cities for quick access.</a:t>
-            </a:r>
-          </a:p>
-          <a:p>
-            <a:r>
-              <a:rPr lang="en-US" sz="3600" dirty="0">
-                <a:solidFill>
-                  <a:schemeClr val="tx1"/>
-                </a:solidFill>
-              </a:rPr>
-              <a:t>• UI/UX: Built using Material 3 design principles and </a:t>
-            </a:r>
-            <a:r>
-              <a:rPr lang="en-US" sz="3600" dirty="0" err="1">
+              <a:t>• UI/UX: Material 3 design, </a:t>
+            </a:r>
+            <a:r>
+              <a:rPr sz="3200" b="0" dirty="0" err="1">
                 <a:solidFill>
                   <a:schemeClr val="tx1"/>
                 </a:solidFill>
@@ -3673,18 +3737,29 @@
               <a:t>ViewBinding</a:t>
             </a:r>
             <a:r>
-              <a:rPr lang="en-US" sz="3600" dirty="0">
+              <a:rPr sz="3200" b="0" dirty="0">
                 <a:solidFill>
                   <a:schemeClr val="tx1"/>
                 </a:solidFill>
               </a:rPr>
-              <a:t> for efficient UI updates.</a:t>
-            </a:r>
-            <a:endParaRPr lang="en-IL" sz="3600" dirty="0">
-              <a:solidFill>
-                <a:schemeClr val="tx1"/>
-              </a:solidFill>
-            </a:endParaRPr>
+              <a:t>, and reactive UI updates via </a:t>
+            </a:r>
+            <a:r>
+              <a:rPr sz="3200" b="0" dirty="0" err="1">
+                <a:solidFill>
+                  <a:schemeClr val="tx1"/>
+                </a:solidFill>
+              </a:rPr>
+              <a:t>LiveData</a:t>
+            </a:r>
+            <a:r>
+              <a:rPr sz="3200" b="0" dirty="0">
+                <a:solidFill>
+                  <a:schemeClr val="tx1"/>
+                </a:solidFill>
+              </a:rPr>
+              <a:t> / Flow.</a:t>
+            </a:r>
           </a:p>
         </p:txBody>
       </p:sp>
@@ -3702,8 +3777,8 @@
         </p:nvSpPr>
         <p:spPr>
           <a:xfrm>
-            <a:off x="818147" y="24630661"/>
-            <a:ext cx="13343330" cy="6429442"/>
+            <a:off x="733457" y="27166528"/>
+            <a:ext cx="13343330" cy="4130401"/>
           </a:xfrm>
           <a:prstGeom prst="roundRect">
             <a:avLst/>
@@ -3738,43 +3813,35 @@
           <a:lstStyle/>
           <a:p>
             <a:r>
-              <a:rPr lang="en-US" sz="3600" dirty="0">
+              <a:rPr sz="4000" b="1" dirty="0">
                 <a:solidFill>
                   <a:schemeClr val="tx1"/>
                 </a:solidFill>
               </a:rPr>
-              <a:t>4. </a:t>
-            </a:r>
-            <a:r>
-              <a:rPr lang="en-US" sz="3600" b="1" dirty="0">
+              <a:t>4. Conclusions</a:t>
+            </a:r>
+          </a:p>
+          <a:p>
+            <a:r>
+              <a:rPr sz="3200" b="0" dirty="0">
                 <a:solidFill>
                   <a:schemeClr val="tx1"/>
                 </a:solidFill>
               </a:rPr>
-              <a:t>Conclusions</a:t>
-            </a:r>
-          </a:p>
-          <a:p>
-            <a:r>
-              <a:rPr lang="en-US" sz="3600" dirty="0">
+              <a:t>• Achieved Goals: Robust weather tracking with synchronized remote API data and local Room storage.</a:t>
+            </a:r>
+          </a:p>
+          <a:p>
+            <a:r>
+              <a:rPr sz="3200" b="0" dirty="0">
                 <a:solidFill>
                   <a:schemeClr val="tx1"/>
                 </a:solidFill>
               </a:rPr>
-              <a:t>• Achieved Goals: Successfully implemented a robust weather tracking system that synchronizes remote API data with a local database.</a:t>
-            </a:r>
-          </a:p>
-          <a:p>
-            <a:r>
-              <a:rPr lang="en-US" sz="3600" dirty="0">
-                <a:solidFill>
-                  <a:schemeClr val="tx1"/>
-                </a:solidFill>
-              </a:rPr>
-              <a:t>• Results: The app provides sub-second UI updates through reactive streams (</a:t>
-            </a:r>
-            <a:r>
-              <a:rPr lang="en-US" sz="3600" dirty="0" err="1">
+              <a:t>• Results: Sub-second UI updates through reactive streams (</a:t>
+            </a:r>
+            <a:r>
+              <a:rPr sz="3200" b="0" dirty="0" err="1">
                 <a:solidFill>
                   <a:schemeClr val="tx1"/>
                 </a:solidFill>
@@ -3782,28 +3849,23 @@
               <a:t>LiveData</a:t>
             </a:r>
             <a:r>
-              <a:rPr lang="en-US" sz="3600" dirty="0">
+              <a:rPr sz="3200" b="0" dirty="0">
                 <a:solidFill>
                   <a:schemeClr val="tx1"/>
                 </a:solidFill>
               </a:rPr>
-              <a:t>/Flow).</a:t>
-            </a:r>
-          </a:p>
-          <a:p>
-            <a:r>
-              <a:rPr lang="en-US" sz="3600" dirty="0">
+              <a:t> / Flow).</a:t>
+            </a:r>
+          </a:p>
+          <a:p>
+            <a:r>
+              <a:rPr sz="3200" b="0" dirty="0">
                 <a:solidFill>
                   <a:schemeClr val="tx1"/>
                 </a:solidFill>
               </a:rPr>
-              <a:t>• Comparison: Compared to the initial project target of a simple weather display, the final result exceeds requirements by including background workers, advanced Air Quality data, and persistent user favorites using Room.</a:t>
-            </a:r>
-            <a:endParaRPr lang="en-IL" sz="3600" dirty="0">
-              <a:solidFill>
-                <a:schemeClr val="tx1"/>
-              </a:solidFill>
-            </a:endParaRPr>
+              <a:t>• Comparison: Exceeds the initial simple-weather target with background workers, air-quality data, and persistent favorites.</a:t>
+            </a:r>
           </a:p>
         </p:txBody>
       </p:sp>
@@ -3821,8 +3883,8 @@
         </p:nvSpPr>
         <p:spPr>
           <a:xfrm>
-            <a:off x="818147" y="31296930"/>
-            <a:ext cx="13343330" cy="4037428"/>
+            <a:off x="733457" y="31775400"/>
+            <a:ext cx="13343330" cy="3839307"/>
           </a:xfrm>
           <a:prstGeom prst="roundRect">
             <a:avLst/>
@@ -3857,48 +3919,33 @@
           <a:lstStyle/>
           <a:p>
             <a:r>
-              <a:rPr lang="en-US" sz="3600" dirty="0">
+              <a:rPr sz="4000" b="1" dirty="0">
                 <a:solidFill>
                   <a:schemeClr val="tx1"/>
                 </a:solidFill>
               </a:rPr>
-              <a:t>5. </a:t>
-            </a:r>
-            <a:r>
-              <a:rPr lang="en-US" sz="3600" b="1" dirty="0">
+              <a:t>5. Discussions</a:t>
+            </a:r>
+          </a:p>
+          <a:p>
+            <a:r>
+              <a:rPr sz="3200" b="0" dirty="0">
                 <a:solidFill>
                   <a:schemeClr val="tx1"/>
                 </a:solidFill>
               </a:rPr>
-              <a:t>Discussions</a:t>
-            </a:r>
-          </a:p>
-          <a:p>
-            <a:r>
-              <a:rPr lang="en-US" sz="3600" dirty="0">
+              <a:t>• Further Development: Home-screen widgets, severe-weather notifications, and interactive radar maps via Google Maps API.</a:t>
+            </a:r>
+          </a:p>
+          <a:p>
+            <a:r>
+              <a:rPr sz="3200" b="0" dirty="0">
                 <a:solidFill>
                   <a:schemeClr val="tx1"/>
                 </a:solidFill>
               </a:rPr>
-              <a:t>• Further Development: Future iterations will include Home Screen Widgets, severe weather push notifications, and detailed weather maps using Google Maps API.</a:t>
-            </a:r>
-          </a:p>
-          <a:p>
-            <a:r>
-              <a:rPr lang="en-US" sz="3600" dirty="0">
-                <a:solidFill>
-                  <a:schemeClr val="tx1"/>
-                </a:solidFill>
-              </a:rPr>
-              <a:t>◦ [Insert QR Code 1: Link to Project Demo Video]- will be done later</a:t>
-            </a:r>
-          </a:p>
-          <a:p>
-            <a:endParaRPr lang="en-IL" sz="3800" dirty="0">
-              <a:solidFill>
-                <a:schemeClr val="tx1"/>
-              </a:solidFill>
-            </a:endParaRPr>
+              <a:t>• Demo Video: Scan the QR code in the Access section or watch on YouTube: https://www.youtube.com/watch?v=B0h5Y6Pb5s0</a:t>
+            </a:r>
           </a:p>
         </p:txBody>
       </p:sp>
@@ -3917,7 +3964,7 @@
         <p:spPr>
           <a:xfrm>
             <a:off x="14365545" y="31356292"/>
-            <a:ext cx="10016283" cy="4258415"/>
+            <a:ext cx="10437555" cy="4258415"/>
           </a:xfrm>
           <a:prstGeom prst="roundRect">
             <a:avLst/>
@@ -3952,7 +3999,7 @@
           <a:lstStyle/>
           <a:p>
             <a:r>
-              <a:rPr lang="en-US" sz="3800" dirty="0">
+              <a:rPr sz="3800" b="1" dirty="0">
                 <a:solidFill>
                   <a:schemeClr val="tx1"/>
                 </a:solidFill>
@@ -3990,8 +4037,8 @@
         </p:blipFill>
         <p:spPr>
           <a:xfrm>
-            <a:off x="20889978" y="32131266"/>
-            <a:ext cx="3203092" cy="3203092"/>
+            <a:off x="20889978" y="31842507"/>
+            <a:ext cx="3491850" cy="3491850"/>
           </a:xfrm>
           <a:prstGeom prst="rect">
             <a:avLst/>
@@ -4044,7 +4091,7 @@
         </p:nvSpPr>
         <p:spPr>
           <a:xfrm>
-            <a:off x="21000720" y="31577280"/>
+            <a:off x="20889978" y="31311065"/>
             <a:ext cx="2865120" cy="461665"/>
           </a:xfrm>
           <a:prstGeom prst="rect">
@@ -4058,12 +4105,10 @@
           </a:bodyPr>
           <a:lstStyle/>
           <a:p>
-            <a:pPr algn="ctr"/>
-            <a:r>
-              <a:rPr lang="en-US" sz="2400" dirty="0"/>
-              <a:t>GitHub link:</a:t>
-            </a:r>
-            <a:endParaRPr lang="en-IL" sz="2400" dirty="0"/>
+            <a:r>
+              <a:rPr sz="2400" dirty="0"/>
+              <a:t>GitHub </a:t>
+            </a:r>
           </a:p>
         </p:txBody>
       </p:sp>
@@ -4085,6 +4130,77 @@
           <a:xfrm>
             <a:off x="14365545" y="18494895"/>
             <a:ext cx="10016283" cy="12802035"/>
+          </a:xfrm>
+          <a:prstGeom prst="rect">
+            <a:avLst/>
+          </a:prstGeom>
+        </p:spPr>
+      </p:pic>
+      <p:sp>
+        <p:nvSpPr>
+          <p:cNvPr id="10" name="TextBox 9">
+            <a:extLst>
+              <a:ext uri="{FF2B5EF4-FFF2-40B4-BE49-F238E27FC236}">
+                <a16:creationId xmlns:a16="http://schemas.microsoft.com/office/drawing/2014/main" id="{58DC438E-8997-D725-847D-466B5EE98B8A}"/>
+              </a:ext>
+            </a:extLst>
+          </p:cNvPr>
+          <p:cNvSpPr txBox="1"/>
+          <p:nvPr/>
+        </p:nvSpPr>
+        <p:spPr>
+          <a:xfrm>
+            <a:off x="17217525" y="31342157"/>
+            <a:ext cx="2865120" cy="461665"/>
+          </a:xfrm>
+          <a:prstGeom prst="rect">
+            <a:avLst/>
+          </a:prstGeom>
+          <a:noFill/>
+        </p:spPr>
+        <p:txBody>
+          <a:bodyPr wrap="square" rtlCol="0">
+            <a:spAutoFit/>
+          </a:bodyPr>
+          <a:lstStyle/>
+          <a:p>
+            <a:r>
+              <a:rPr sz="2400" dirty="0"/>
+              <a:t>Video</a:t>
+            </a:r>
+          </a:p>
+        </p:txBody>
+      </p:sp>
+      <p:pic>
+        <p:nvPicPr>
+          <p:cNvPr id="14" name="Picture 13">
+            <a:extLst>
+              <a:ext uri="{FF2B5EF4-FFF2-40B4-BE49-F238E27FC236}">
+                <a16:creationId xmlns:a16="http://schemas.microsoft.com/office/drawing/2014/main" id="{21A65628-EFB9-36AC-4D22-DAF57B899CAF}"/>
+              </a:ext>
+            </a:extLst>
+          </p:cNvPr>
+          <p:cNvPicPr>
+            <a:picLocks noChangeAspect="1"/>
+          </p:cNvPicPr>
+          <p:nvPr/>
+        </p:nvPicPr>
+        <p:blipFill>
+          <a:blip r:embed="rId6">
+            <a:extLst>
+              <a:ext uri="{28A0092B-C50C-407E-A947-70E740481C1C}">
+                <a14:useLocalDpi xmlns:a14="http://schemas.microsoft.com/office/drawing/2010/main" val="0"/>
+              </a:ext>
+            </a:extLst>
+          </a:blip>
+          <a:stretch>
+            <a:fillRect/>
+          </a:stretch>
+        </p:blipFill>
+        <p:spPr>
+          <a:xfrm>
+            <a:off x="17217525" y="31839920"/>
+            <a:ext cx="3494437" cy="3494437"/>
           </a:xfrm>
           <a:prstGeom prst="rect">
             <a:avLst/>
